--- a/livro_ia_educacao/saida/pptx/Cap21_slides.pptx
+++ b/livro_ia_educacao/saida/pptx/Cap21_slides.pptx
@@ -13160,7 +13160,7 @@
                 <a:ea typeface="Cambria" pitchFamily="34" charset="-122"/>
                 <a:cs typeface="Cambria" pitchFamily="34" charset="-120"/>
               </a:rPr>
-              <a:t>Interdisciplinaridade</a:t>
+              <a:t>Interdisciplinar</a:t>
             </a:r>
             <a:endParaRPr lang="en-US" sz="1800" dirty="0"/>
           </a:p>
@@ -13333,7 +13333,7 @@
                 <a:ea typeface="Cambria" pitchFamily="34" charset="-122"/>
                 <a:cs typeface="Cambria" pitchFamily="34" charset="-120"/>
               </a:rPr>
-              <a:t>Multidisciplinaridade</a:t>
+              <a:t>Multidisciplinar</a:t>
             </a:r>
             <a:endParaRPr lang="en-US" sz="1800" dirty="0"/>
           </a:p>

--- a/livro_ia_educacao/saida/pptx/Cap21_slides.pptx
+++ b/livro_ia_educacao/saida/pptx/Cap21_slides.pptx
@@ -10992,11 +10992,11 @@
         <p:spPr>
           <a:xfrm>
             <a:off x="548640" y="1417320"/>
-            <a:ext cx="11064240" cy="762000"/>
+            <a:ext cx="11064240" cy="682752"/>
           </a:xfrm>
           <a:prstGeom prst="roundRect">
             <a:avLst>
-              <a:gd name="adj" fmla="val 14400"/>
+              <a:gd name="adj" fmla="val 16071"/>
             </a:avLst>
           </a:prstGeom>
           <a:solidFill>
@@ -11023,7 +11023,7 @@
         <p:spPr>
           <a:xfrm>
             <a:off x="731520" y="1417320"/>
-            <a:ext cx="548640" cy="762000"/>
+            <a:ext cx="548640" cy="682752"/>
           </a:xfrm>
           <a:prstGeom prst="rect">
             <a:avLst/>
@@ -11059,7 +11059,7 @@
         <p:spPr>
           <a:xfrm>
             <a:off x="1463040" y="1417320"/>
-            <a:ext cx="9966960" cy="762000"/>
+            <a:ext cx="9966960" cy="682752"/>
           </a:xfrm>
           <a:prstGeom prst="rect">
             <a:avLst/>
@@ -11094,12 +11094,12 @@
         </p:nvSpPr>
         <p:spPr>
           <a:xfrm>
-            <a:off x="548640" y="2289048"/>
-            <a:ext cx="11064240" cy="762000"/>
+            <a:off x="548640" y="2209800"/>
+            <a:ext cx="11064240" cy="682752"/>
           </a:xfrm>
           <a:prstGeom prst="roundRect">
             <a:avLst>
-              <a:gd name="adj" fmla="val 14400"/>
+              <a:gd name="adj" fmla="val 16071"/>
             </a:avLst>
           </a:prstGeom>
           <a:solidFill>
@@ -11125,8 +11125,8 @@
         </p:nvSpPr>
         <p:spPr>
           <a:xfrm>
-            <a:off x="731520" y="2289048"/>
-            <a:ext cx="548640" cy="762000"/>
+            <a:off x="731520" y="2209800"/>
+            <a:ext cx="548640" cy="682752"/>
           </a:xfrm>
           <a:prstGeom prst="rect">
             <a:avLst/>
@@ -11161,8 +11161,8 @@
         </p:nvSpPr>
         <p:spPr>
           <a:xfrm>
-            <a:off x="1463040" y="2289048"/>
-            <a:ext cx="9966960" cy="762000"/>
+            <a:off x="1463040" y="2209800"/>
+            <a:ext cx="9966960" cy="682752"/>
           </a:xfrm>
           <a:prstGeom prst="rect">
             <a:avLst/>
@@ -11197,12 +11197,12 @@
         </p:nvSpPr>
         <p:spPr>
           <a:xfrm>
-            <a:off x="548640" y="3160776"/>
-            <a:ext cx="11064240" cy="762000"/>
+            <a:off x="548640" y="3002280"/>
+            <a:ext cx="11064240" cy="682752"/>
           </a:xfrm>
           <a:prstGeom prst="roundRect">
             <a:avLst>
-              <a:gd name="adj" fmla="val 14400"/>
+              <a:gd name="adj" fmla="val 16071"/>
             </a:avLst>
           </a:prstGeom>
           <a:solidFill>
@@ -11228,8 +11228,8 @@
         </p:nvSpPr>
         <p:spPr>
           <a:xfrm>
-            <a:off x="731520" y="3160776"/>
-            <a:ext cx="548640" cy="762000"/>
+            <a:off x="731520" y="3002280"/>
+            <a:ext cx="548640" cy="682752"/>
           </a:xfrm>
           <a:prstGeom prst="rect">
             <a:avLst/>
@@ -11264,8 +11264,8 @@
         </p:nvSpPr>
         <p:spPr>
           <a:xfrm>
-            <a:off x="1463040" y="3160776"/>
-            <a:ext cx="9966960" cy="762000"/>
+            <a:off x="1463040" y="3002280"/>
+            <a:ext cx="9966960" cy="682752"/>
           </a:xfrm>
           <a:prstGeom prst="rect">
             <a:avLst/>
@@ -11300,12 +11300,12 @@
         </p:nvSpPr>
         <p:spPr>
           <a:xfrm>
-            <a:off x="548640" y="4032504"/>
-            <a:ext cx="11064240" cy="762000"/>
+            <a:off x="548640" y="3794760"/>
+            <a:ext cx="11064240" cy="682752"/>
           </a:xfrm>
           <a:prstGeom prst="roundRect">
             <a:avLst>
-              <a:gd name="adj" fmla="val 14400"/>
+              <a:gd name="adj" fmla="val 16071"/>
             </a:avLst>
           </a:prstGeom>
           <a:solidFill>
@@ -11331,8 +11331,8 @@
         </p:nvSpPr>
         <p:spPr>
           <a:xfrm>
-            <a:off x="731520" y="4032504"/>
-            <a:ext cx="548640" cy="762000"/>
+            <a:off x="731520" y="3794760"/>
+            <a:ext cx="548640" cy="682752"/>
           </a:xfrm>
           <a:prstGeom prst="rect">
             <a:avLst/>
@@ -11367,8 +11367,8 @@
         </p:nvSpPr>
         <p:spPr>
           <a:xfrm>
-            <a:off x="1463040" y="4032504"/>
-            <a:ext cx="9966960" cy="762000"/>
+            <a:off x="1463040" y="3794760"/>
+            <a:ext cx="9966960" cy="682752"/>
           </a:xfrm>
           <a:prstGeom prst="rect">
             <a:avLst/>
@@ -11403,12 +11403,12 @@
         </p:nvSpPr>
         <p:spPr>
           <a:xfrm>
-            <a:off x="548640" y="4904232"/>
-            <a:ext cx="11064240" cy="762000"/>
+            <a:off x="548640" y="4587240"/>
+            <a:ext cx="11064240" cy="682752"/>
           </a:xfrm>
           <a:prstGeom prst="roundRect">
             <a:avLst>
-              <a:gd name="adj" fmla="val 14400"/>
+              <a:gd name="adj" fmla="val 16071"/>
             </a:avLst>
           </a:prstGeom>
           <a:solidFill>
@@ -11434,8 +11434,8 @@
         </p:nvSpPr>
         <p:spPr>
           <a:xfrm>
-            <a:off x="731520" y="4904232"/>
-            <a:ext cx="548640" cy="762000"/>
+            <a:off x="731520" y="4587240"/>
+            <a:ext cx="548640" cy="682752"/>
           </a:xfrm>
           <a:prstGeom prst="rect">
             <a:avLst/>
@@ -11470,8 +11470,8 @@
         </p:nvSpPr>
         <p:spPr>
           <a:xfrm>
-            <a:off x="1463040" y="4904232"/>
-            <a:ext cx="9966960" cy="762000"/>
+            <a:off x="1463040" y="4587240"/>
+            <a:ext cx="9966960" cy="682752"/>
           </a:xfrm>
           <a:prstGeom prst="rect">
             <a:avLst/>
@@ -11506,12 +11506,12 @@
         </p:nvSpPr>
         <p:spPr>
           <a:xfrm>
-            <a:off x="548640" y="5775960"/>
-            <a:ext cx="11064240" cy="762000"/>
+            <a:off x="548640" y="5379720"/>
+            <a:ext cx="11064240" cy="682752"/>
           </a:xfrm>
           <a:prstGeom prst="roundRect">
             <a:avLst>
-              <a:gd name="adj" fmla="val 14400"/>
+              <a:gd name="adj" fmla="val 16071"/>
             </a:avLst>
           </a:prstGeom>
           <a:solidFill>
@@ -11537,8 +11537,8 @@
         </p:nvSpPr>
         <p:spPr>
           <a:xfrm>
-            <a:off x="731520" y="5775960"/>
-            <a:ext cx="548640" cy="762000"/>
+            <a:off x="731520" y="5379720"/>
+            <a:ext cx="548640" cy="682752"/>
           </a:xfrm>
           <a:prstGeom prst="rect">
             <a:avLst/>
@@ -11573,8 +11573,8 @@
         </p:nvSpPr>
         <p:spPr>
           <a:xfrm>
-            <a:off x="1463040" y="5775960"/>
-            <a:ext cx="9966960" cy="762000"/>
+            <a:off x="1463040" y="5379720"/>
+            <a:ext cx="9966960" cy="682752"/>
           </a:xfrm>
           <a:prstGeom prst="rect">
             <a:avLst/>
